--- a/hayate-deck.pptx
+++ b/hayate-deck.pptx
@@ -80,135 +80,6 @@
           <a:chExt cx="0" cy="0"/>
         </a:xfrm>
       </p:grpSpPr>
-      <p:sp>
-        <p:nvSpPr>
-          <p:cNvPr id="2" name="Shape 2"/>
-          <p:cNvSpPr txBox="1"/>
-          <p:nvPr/>
-        </p:nvSpPr>
-        <p:spPr>
-          <a:xfrm>
-            <a:off x="457200" y="274320"/>
-            <a:ext cx="8229600" cy="914400"/>
-          </a:xfrm>
-          <a:prstGeom prst="rect">
-            <a:avLst/>
-          </a:prstGeom>
-        </p:spPr>
-        <p:txBody>
-          <a:bodyPr wrap="square" rtlCol="0">
-            <a:normAutofit/>
-          </a:bodyPr>
-          <a:lstStyle/>
-          <a:p>
-            <a:pPr algn="l"/>
-            <a:r>
-              <a:rPr lang="en-US" sz="4000" b="1">
-                <a:solidFill>
-                  <a:srgbClr val="000000"/>
-                </a:solidFill>
-              </a:rPr>
-              <a:t>Hayate プレゼンテーション</a:t>
-            </a:r>
-          </a:p>
-        </p:txBody>
-      </p:sp>
-      <p:sp>
-        <p:nvSpPr>
-          <p:cNvPr id="3" name="Shape 3"/>
-          <p:cNvSpPr/>
-          <p:nvPr/>
-        </p:nvSpPr>
-        <p:spPr>
-          <a:xfrm>
-            <a:off x="457200" y="1645920"/>
-            <a:ext cx="1463040" cy="1463040"/>
-          </a:xfrm>
-          <a:prstGeom prst="rect">
-            <a:avLst/>
-          </a:prstGeom>
-          <a:solidFill>
-            <a:srgbClr val="4F81BD"/>
-          </a:solidFill>
-        </p:spPr>
-        <p:txBody>
-          <a:bodyPr/>
-          <a:lstStyle/>
-          <a:p/>
-        </p:txBody>
-      </p:sp>
-      <p:sp>
-        <p:nvSpPr>
-          <p:cNvPr id="4" name="Shape 4"/>
-          <p:cNvSpPr/>
-          <p:nvPr/>
-        </p:nvSpPr>
-        <p:spPr>
-          <a:xfrm>
-            <a:off x="2286000" y="1645920"/>
-            <a:ext cx="1463040" cy="1463040"/>
-          </a:xfrm>
-          <a:prstGeom prst="rect">
-            <a:avLst/>
-          </a:prstGeom>
-          <a:solidFill>
-            <a:srgbClr val="C0504D"/>
-          </a:solidFill>
-        </p:spPr>
-        <p:txBody>
-          <a:bodyPr/>
-          <a:lstStyle/>
-          <a:p/>
-        </p:txBody>
-      </p:sp>
-      <p:sp>
-        <p:nvSpPr>
-          <p:cNvPr id="5" name="Shape 5"/>
-          <p:cNvSpPr/>
-          <p:nvPr/>
-        </p:nvSpPr>
-        <p:spPr>
-          <a:xfrm>
-            <a:off x="4114800" y="1645920"/>
-            <a:ext cx="1463040" cy="1463040"/>
-          </a:xfrm>
-          <a:prstGeom prst="rect">
-            <a:avLst/>
-          </a:prstGeom>
-          <a:solidFill>
-            <a:srgbClr val="9BBB59"/>
-          </a:solidFill>
-        </p:spPr>
-        <p:txBody>
-          <a:bodyPr/>
-          <a:lstStyle/>
-          <a:p/>
-        </p:txBody>
-      </p:sp>
-      <p:sp>
-        <p:nvSpPr>
-          <p:cNvPr id="6" name="Shape 6"/>
-          <p:cNvSpPr/>
-          <p:nvPr/>
-        </p:nvSpPr>
-        <p:spPr>
-          <a:xfrm>
-            <a:off x="6217920" y="1645920"/>
-            <a:ext cx="2194560" cy="1463040"/>
-          </a:xfrm>
-          <a:prstGeom prst="ellipse">
-            <a:avLst/>
-          </a:prstGeom>
-          <a:solidFill>
-            <a:srgbClr val="8064A2"/>
-          </a:solidFill>
-        </p:spPr>
-        <p:txBody>
-          <a:bodyPr/>
-          <a:lstStyle/>
-          <a:p/>
-        </p:txBody>
-      </p:sp>
     </p:spTree>
   </p:cSld>
   <p:clrMapOvr>
@@ -260,14 +131,14 @@
     </a:clrScheme>
     <a:fontScheme name="HayateFonts">
       <a:majorFont>
-        <a:latin typeface="Arial"/>
-        <a:ea typeface="Noto Sans JP"/>
-        <a:cs typeface="Arial"/>
+        <a:latin typeface="Noto Sans CJK JP"/>
+        <a:ea typeface="Noto Sans CJK JP"/>
+        <a:cs typeface="Noto Sans CJK JP"/>
       </a:majorFont>
       <a:minorFont>
-        <a:latin typeface="Arial"/>
-        <a:ea typeface="Noto Sans JP"/>
-        <a:cs typeface="Arial"/>
+        <a:latin typeface="Noto Sans CJK JP"/>
+        <a:ea typeface="Noto Sans CJK JP"/>
+        <a:cs typeface="Noto Sans CJK JP"/>
       </a:minorFont>
     </a:fontScheme>
     <a:fmtScheme name="HayateFmt">
